--- a/Parallel_File_Search_Using_Threads.pptx
+++ b/Parallel_File_Search_Using_Threads.pptx
@@ -2065,7 +2065,7 @@
                   <a:schemeClr val="tx1"/>
                 </a:solidFill>
               </a:rPr>
-              <a:t>Venkata Sai Krishna   2520030027</a:t>
+              <a:t>Venkata Sai Krishna  2520030027</a:t>
             </a:r>
           </a:p>
           <a:p>
@@ -2098,7 +2098,7 @@
                   <a:schemeClr val="tx1"/>
                 </a:solidFill>
               </a:rPr>
-              <a:t>Ajai Manikanta   2520030320</a:t>
+              <a:t>Ajai Manikanta  2520030320</a:t>
             </a:r>
           </a:p>
           <a:p>
